--- a/Presentazione Progetto.pptx
+++ b/Presentazione Progetto.pptx
@@ -16,7 +16,7 @@
     <p:sldId id="264" r:id="rId10"/>
   </p:sldIdLst>
   <p:sldSz cx="12192000" cy="6858000"/>
-  <p:notesSz cx="6858000" cy="9144000"/>
+  <p:notesSz cx="7099300" cy="10234613"/>
   <p:defaultTextStyle>
     <a:defPPr>
       <a:defRPr lang="it-IT"/>
@@ -112,6 +112,11 @@
       </a:defRPr>
     </a:lvl9pPr>
   </p:defaultTextStyle>
+  <p:extLst>
+    <p:ext uri="{EFAFB233-063F-42B5-8137-9DF3F51BA10A}">
+      <p15:sldGuideLst xmlns:p15="http://schemas.microsoft.com/office/powerpoint/2012/main"/>
+    </p:ext>
+  </p:extLst>
 </p:presentation>
 </file>
 
@@ -3433,8 +3438,17 @@
             </a:br>
             <a:r>
               <a:rPr lang="en-US" dirty="0"/>
-              <a:t> https://github.com/StatJon/Progetto-IngegneriaSistemiWeb.git</a:t>
-            </a:r>
+              <a:t> </a:t>
+            </a:r>
+            <a:r>
+              <a:rPr lang="en-US" dirty="0">
+                <a:hlinkClick r:id="rId4"/>
+              </a:rPr>
+              <a:t>https://github.com/StatJon/Progetto-IngegneriaSistemiWeb.git</a:t>
+            </a:r>
+            <a:endParaRPr lang="en-US" dirty="0"/>
+          </a:p>
+          <a:p>
             <a:endParaRPr lang="it-IT" dirty="0"/>
           </a:p>
           <a:p>
@@ -3835,7 +3849,7 @@
         <p:spPr/>
         <p:txBody>
           <a:bodyPr>
-            <a:normAutofit fontScale="92500" lnSpcReduction="20000"/>
+            <a:normAutofit fontScale="85000" lnSpcReduction="20000"/>
           </a:bodyPr>
           <a:lstStyle/>
           <a:p>
@@ -3855,13 +3869,13 @@
             </a:r>
             <a:r>
               <a:rPr lang="it-IT" dirty="0"/>
-              <a:t> ed homepage.</a:t>
+              <a:t>, homepage e pagina utente.</a:t>
             </a:r>
           </a:p>
           <a:p>
             <a:r>
               <a:rPr lang="it-IT" dirty="0"/>
-              <a:t>Successivamente è necessario scegliere quali servizi effettuare ed infine inserire i dettagli del veicolo e decidere la data e l’ora dell’appuntamento.</a:t>
+              <a:t>Successivamente è necessario scegliere quali servizi effettuare ed infine inserire i dettagli del veicolo e decidere la data e l’ora dell’appuntamento, vengono mostrati i giorni e gli orari disponibili in base alla disponibilità di meccanici a quell’ora-giorno.</a:t>
             </a:r>
           </a:p>
           <a:p>

--- a/Presentazione Progetto.pptx
+++ b/Presentazione Progetto.pptx
@@ -267,7 +267,7 @@
           <a:p>
             <a:fld id="{C22E3EE1-7BEC-4089-B6A5-C51A31992472}" type="datetimeFigureOut">
               <a:rPr lang="it-IT" smtClean="0"/>
-              <a:t>06/06/2026</a:t>
+              <a:t>07/06/2026</a:t>
             </a:fld>
             <a:endParaRPr lang="it-IT"/>
           </a:p>
@@ -465,7 +465,7 @@
           <a:p>
             <a:fld id="{C22E3EE1-7BEC-4089-B6A5-C51A31992472}" type="datetimeFigureOut">
               <a:rPr lang="it-IT" smtClean="0"/>
-              <a:t>06/06/2026</a:t>
+              <a:t>07/06/2026</a:t>
             </a:fld>
             <a:endParaRPr lang="it-IT"/>
           </a:p>
@@ -673,7 +673,7 @@
           <a:p>
             <a:fld id="{C22E3EE1-7BEC-4089-B6A5-C51A31992472}" type="datetimeFigureOut">
               <a:rPr lang="it-IT" smtClean="0"/>
-              <a:t>06/06/2026</a:t>
+              <a:t>07/06/2026</a:t>
             </a:fld>
             <a:endParaRPr lang="it-IT"/>
           </a:p>
@@ -871,7 +871,7 @@
           <a:p>
             <a:fld id="{C22E3EE1-7BEC-4089-B6A5-C51A31992472}" type="datetimeFigureOut">
               <a:rPr lang="it-IT" smtClean="0"/>
-              <a:t>06/06/2026</a:t>
+              <a:t>07/06/2026</a:t>
             </a:fld>
             <a:endParaRPr lang="it-IT"/>
           </a:p>
@@ -1146,7 +1146,7 @@
           <a:p>
             <a:fld id="{C22E3EE1-7BEC-4089-B6A5-C51A31992472}" type="datetimeFigureOut">
               <a:rPr lang="it-IT" smtClean="0"/>
-              <a:t>06/06/2026</a:t>
+              <a:t>07/06/2026</a:t>
             </a:fld>
             <a:endParaRPr lang="it-IT"/>
           </a:p>
@@ -1411,7 +1411,7 @@
           <a:p>
             <a:fld id="{C22E3EE1-7BEC-4089-B6A5-C51A31992472}" type="datetimeFigureOut">
               <a:rPr lang="it-IT" smtClean="0"/>
-              <a:t>06/06/2026</a:t>
+              <a:t>07/06/2026</a:t>
             </a:fld>
             <a:endParaRPr lang="it-IT"/>
           </a:p>
@@ -1823,7 +1823,7 @@
           <a:p>
             <a:fld id="{C22E3EE1-7BEC-4089-B6A5-C51A31992472}" type="datetimeFigureOut">
               <a:rPr lang="it-IT" smtClean="0"/>
-              <a:t>06/06/2026</a:t>
+              <a:t>07/06/2026</a:t>
             </a:fld>
             <a:endParaRPr lang="it-IT"/>
           </a:p>
@@ -1964,7 +1964,7 @@
           <a:p>
             <a:fld id="{C22E3EE1-7BEC-4089-B6A5-C51A31992472}" type="datetimeFigureOut">
               <a:rPr lang="it-IT" smtClean="0"/>
-              <a:t>06/06/2026</a:t>
+              <a:t>07/06/2026</a:t>
             </a:fld>
             <a:endParaRPr lang="it-IT"/>
           </a:p>
@@ -2077,7 +2077,7 @@
           <a:p>
             <a:fld id="{C22E3EE1-7BEC-4089-B6A5-C51A31992472}" type="datetimeFigureOut">
               <a:rPr lang="it-IT" smtClean="0"/>
-              <a:t>06/06/2026</a:t>
+              <a:t>07/06/2026</a:t>
             </a:fld>
             <a:endParaRPr lang="it-IT"/>
           </a:p>
@@ -2388,7 +2388,7 @@
           <a:p>
             <a:fld id="{C22E3EE1-7BEC-4089-B6A5-C51A31992472}" type="datetimeFigureOut">
               <a:rPr lang="it-IT" smtClean="0"/>
-              <a:t>06/06/2026</a:t>
+              <a:t>07/06/2026</a:t>
             </a:fld>
             <a:endParaRPr lang="it-IT"/>
           </a:p>
@@ -2676,7 +2676,7 @@
           <a:p>
             <a:fld id="{C22E3EE1-7BEC-4089-B6A5-C51A31992472}" type="datetimeFigureOut">
               <a:rPr lang="it-IT" smtClean="0"/>
-              <a:t>06/06/2026</a:t>
+              <a:t>07/06/2026</a:t>
             </a:fld>
             <a:endParaRPr lang="it-IT"/>
           </a:p>
@@ -2917,7 +2917,7 @@
           <a:p>
             <a:fld id="{C22E3EE1-7BEC-4089-B6A5-C51A31992472}" type="datetimeFigureOut">
               <a:rPr lang="it-IT" smtClean="0"/>
-              <a:t>06/06/2026</a:t>
+              <a:t>07/06/2026</a:t>
             </a:fld>
             <a:endParaRPr lang="it-IT"/>
           </a:p>
@@ -3533,7 +3533,9 @@
         </p:nvSpPr>
         <p:spPr/>
         <p:txBody>
-          <a:bodyPr/>
+          <a:bodyPr>
+            <a:normAutofit fontScale="92500"/>
+          </a:bodyPr>
           <a:lstStyle/>
           <a:p>
             <a:r>
@@ -3550,7 +3552,13 @@
           <a:p>
             <a:r>
               <a:rPr lang="it-IT" dirty="0"/>
-              <a:t>I dipendenti possono vedere i lavori prenotati e visualizzare o modificare dei lavoratori ad essi assegnati.</a:t>
+              <a:t>I dipendenti possono vedere i lavori prenotati e visualizzare o modificare lo stato dei lavori ad essi assegnati.</a:t>
+            </a:r>
+          </a:p>
+          <a:p>
+            <a:r>
+              <a:rPr lang="it-IT" dirty="0"/>
+              <a:t>È prevista anche una gestione a livello admin dei lavori e dipendenti</a:t>
             </a:r>
           </a:p>
           <a:p>
@@ -3561,7 +3569,7 @@
               <a:buNone/>
             </a:pPr>
             <a:r>
-              <a:rPr lang="it-IT" sz="2400" i="1" dirty="0"/>
+              <a:rPr lang="it-IT" sz="1800" i="1" dirty="0"/>
               <a:t>È disponibile una versione in formato relazione .docx con approfondimenti tecnici nella root del repo.</a:t>
             </a:r>
           </a:p>
@@ -3613,18 +3621,19 @@
             <p:ph type="title"/>
           </p:nvPr>
         </p:nvSpPr>
-        <p:spPr/>
-        <p:txBody>
-          <a:bodyPr/>
-          <a:lstStyle/>
-          <a:p>
-            <a:r>
-              <a:rPr lang="it-IT" b="1" dirty="0" err="1"/>
-              <a:t>Mockup</a:t>
-            </a:r>
+        <p:spPr>
+          <a:xfrm>
+            <a:off x="838200" y="2766218"/>
+            <a:ext cx="10515600" cy="1325563"/>
+          </a:xfrm>
+        </p:spPr>
+        <p:txBody>
+          <a:bodyPr/>
+          <a:lstStyle/>
+          <a:p>
             <a:r>
               <a:rPr lang="it-IT" b="1" dirty="0"/>
-              <a:t> di partenza </a:t>
+              <a:t>Setup</a:t>
             </a:r>
           </a:p>
         </p:txBody>
@@ -3645,7 +3654,12 @@
             <p:ph idx="1"/>
           </p:nvPr>
         </p:nvSpPr>
-        <p:spPr/>
+        <p:spPr>
+          <a:xfrm>
+            <a:off x="838200" y="1825625"/>
+            <a:ext cx="10515600" cy="940593"/>
+          </a:xfrm>
+        </p:spPr>
         <p:txBody>
           <a:bodyPr/>
           <a:lstStyle/>
@@ -3660,6 +3674,299 @@
           </a:p>
           <a:p>
             <a:pPr marL="0" indent="0">
+              <a:buNone/>
+            </a:pPr>
+            <a:endParaRPr lang="it-IT" dirty="0"/>
+          </a:p>
+        </p:txBody>
+      </p:sp>
+      <p:sp>
+        <p:nvSpPr>
+          <p:cNvPr id="4" name="Titolo 1">
+            <a:extLst>
+              <a:ext uri="{FF2B5EF4-FFF2-40B4-BE49-F238E27FC236}">
+                <a16:creationId xmlns:a16="http://schemas.microsoft.com/office/drawing/2014/main" id="{E0468F6A-887E-80A2-D260-54CD1A3CDA53}"/>
+              </a:ext>
+            </a:extLst>
+          </p:cNvPr>
+          <p:cNvSpPr txBox="1">
+            <a:spLocks/>
+          </p:cNvSpPr>
+          <p:nvPr/>
+        </p:nvSpPr>
+        <p:spPr>
+          <a:xfrm>
+            <a:off x="990600" y="517525"/>
+            <a:ext cx="10515600" cy="1325563"/>
+          </a:xfrm>
+          <a:prstGeom prst="rect">
+            <a:avLst/>
+          </a:prstGeom>
+        </p:spPr>
+        <p:txBody>
+          <a:bodyPr vert="horz" lIns="91440" tIns="45720" rIns="91440" bIns="45720" rtlCol="0" anchor="ctr">
+            <a:normAutofit/>
+          </a:bodyPr>
+          <a:lstStyle>
+            <a:lvl1pPr algn="l" defTabSz="914400" rtl="0" eaLnBrk="1" latinLnBrk="0" hangingPunct="1">
+              <a:lnSpc>
+                <a:spcPct val="90000"/>
+              </a:lnSpc>
+              <a:spcBef>
+                <a:spcPct val="0"/>
+              </a:spcBef>
+              <a:buNone/>
+              <a:defRPr sz="4400" kern="1200">
+                <a:solidFill>
+                  <a:schemeClr val="tx1"/>
+                </a:solidFill>
+                <a:latin typeface="+mj-lt"/>
+                <a:ea typeface="+mj-ea"/>
+                <a:cs typeface="+mj-cs"/>
+              </a:defRPr>
+            </a:lvl1pPr>
+          </a:lstStyle>
+          <a:p>
+            <a:r>
+              <a:rPr lang="it-IT" b="1"/>
+              <a:t>Mockup di partenza </a:t>
+            </a:r>
+            <a:endParaRPr lang="it-IT" b="1" dirty="0"/>
+          </a:p>
+        </p:txBody>
+      </p:sp>
+      <p:sp>
+        <p:nvSpPr>
+          <p:cNvPr id="5" name="Segnaposto contenuto 2">
+            <a:extLst>
+              <a:ext uri="{FF2B5EF4-FFF2-40B4-BE49-F238E27FC236}">
+                <a16:creationId xmlns:a16="http://schemas.microsoft.com/office/drawing/2014/main" id="{29D6B031-0230-464F-4E41-CC248C3B7FA5}"/>
+              </a:ext>
+            </a:extLst>
+          </p:cNvPr>
+          <p:cNvSpPr txBox="1">
+            <a:spLocks/>
+          </p:cNvSpPr>
+          <p:nvPr/>
+        </p:nvSpPr>
+        <p:spPr>
+          <a:xfrm>
+            <a:off x="838200" y="4091781"/>
+            <a:ext cx="10515600" cy="1748846"/>
+          </a:xfrm>
+          <a:prstGeom prst="rect">
+            <a:avLst/>
+          </a:prstGeom>
+        </p:spPr>
+        <p:txBody>
+          <a:bodyPr vert="horz" lIns="91440" tIns="45720" rIns="91440" bIns="45720" rtlCol="0">
+            <a:normAutofit fontScale="92500" lnSpcReduction="10000"/>
+          </a:bodyPr>
+          <a:lstStyle>
+            <a:lvl1pPr marL="228600" indent="-228600" algn="l" defTabSz="914400" rtl="0" eaLnBrk="1" latinLnBrk="0" hangingPunct="1">
+              <a:lnSpc>
+                <a:spcPct val="90000"/>
+              </a:lnSpc>
+              <a:spcBef>
+                <a:spcPts val="1000"/>
+              </a:spcBef>
+              <a:buFont typeface="Arial" panose="020B0604020202020204" pitchFamily="34" charset="0"/>
+              <a:buChar char="•"/>
+              <a:defRPr sz="2800" kern="1200">
+                <a:solidFill>
+                  <a:schemeClr val="tx1"/>
+                </a:solidFill>
+                <a:latin typeface="+mn-lt"/>
+                <a:ea typeface="+mn-ea"/>
+                <a:cs typeface="+mn-cs"/>
+              </a:defRPr>
+            </a:lvl1pPr>
+            <a:lvl2pPr marL="685800" indent="-228600" algn="l" defTabSz="914400" rtl="0" eaLnBrk="1" latinLnBrk="0" hangingPunct="1">
+              <a:lnSpc>
+                <a:spcPct val="90000"/>
+              </a:lnSpc>
+              <a:spcBef>
+                <a:spcPts val="500"/>
+              </a:spcBef>
+              <a:buFont typeface="Arial" panose="020B0604020202020204" pitchFamily="34" charset="0"/>
+              <a:buChar char="•"/>
+              <a:defRPr sz="2400" kern="1200">
+                <a:solidFill>
+                  <a:schemeClr val="tx1"/>
+                </a:solidFill>
+                <a:latin typeface="+mn-lt"/>
+                <a:ea typeface="+mn-ea"/>
+                <a:cs typeface="+mn-cs"/>
+              </a:defRPr>
+            </a:lvl2pPr>
+            <a:lvl3pPr marL="1143000" indent="-228600" algn="l" defTabSz="914400" rtl="0" eaLnBrk="1" latinLnBrk="0" hangingPunct="1">
+              <a:lnSpc>
+                <a:spcPct val="90000"/>
+              </a:lnSpc>
+              <a:spcBef>
+                <a:spcPts val="500"/>
+              </a:spcBef>
+              <a:buFont typeface="Arial" panose="020B0604020202020204" pitchFamily="34" charset="0"/>
+              <a:buChar char="•"/>
+              <a:defRPr sz="2000" kern="1200">
+                <a:solidFill>
+                  <a:schemeClr val="tx1"/>
+                </a:solidFill>
+                <a:latin typeface="+mn-lt"/>
+                <a:ea typeface="+mn-ea"/>
+                <a:cs typeface="+mn-cs"/>
+              </a:defRPr>
+            </a:lvl3pPr>
+            <a:lvl4pPr marL="1600200" indent="-228600" algn="l" defTabSz="914400" rtl="0" eaLnBrk="1" latinLnBrk="0" hangingPunct="1">
+              <a:lnSpc>
+                <a:spcPct val="90000"/>
+              </a:lnSpc>
+              <a:spcBef>
+                <a:spcPts val="500"/>
+              </a:spcBef>
+              <a:buFont typeface="Arial" panose="020B0604020202020204" pitchFamily="34" charset="0"/>
+              <a:buChar char="•"/>
+              <a:defRPr sz="1800" kern="1200">
+                <a:solidFill>
+                  <a:schemeClr val="tx1"/>
+                </a:solidFill>
+                <a:latin typeface="+mn-lt"/>
+                <a:ea typeface="+mn-ea"/>
+                <a:cs typeface="+mn-cs"/>
+              </a:defRPr>
+            </a:lvl4pPr>
+            <a:lvl5pPr marL="2057400" indent="-228600" algn="l" defTabSz="914400" rtl="0" eaLnBrk="1" latinLnBrk="0" hangingPunct="1">
+              <a:lnSpc>
+                <a:spcPct val="90000"/>
+              </a:lnSpc>
+              <a:spcBef>
+                <a:spcPts val="500"/>
+              </a:spcBef>
+              <a:buFont typeface="Arial" panose="020B0604020202020204" pitchFamily="34" charset="0"/>
+              <a:buChar char="•"/>
+              <a:defRPr sz="1800" kern="1200">
+                <a:solidFill>
+                  <a:schemeClr val="tx1"/>
+                </a:solidFill>
+                <a:latin typeface="+mn-lt"/>
+                <a:ea typeface="+mn-ea"/>
+                <a:cs typeface="+mn-cs"/>
+              </a:defRPr>
+            </a:lvl5pPr>
+            <a:lvl6pPr marL="2514600" indent="-228600" algn="l" defTabSz="914400" rtl="0" eaLnBrk="1" latinLnBrk="0" hangingPunct="1">
+              <a:lnSpc>
+                <a:spcPct val="90000"/>
+              </a:lnSpc>
+              <a:spcBef>
+                <a:spcPts val="500"/>
+              </a:spcBef>
+              <a:buFont typeface="Arial" panose="020B0604020202020204" pitchFamily="34" charset="0"/>
+              <a:buChar char="•"/>
+              <a:defRPr sz="1800" kern="1200">
+                <a:solidFill>
+                  <a:schemeClr val="tx1"/>
+                </a:solidFill>
+                <a:latin typeface="+mn-lt"/>
+                <a:ea typeface="+mn-ea"/>
+                <a:cs typeface="+mn-cs"/>
+              </a:defRPr>
+            </a:lvl6pPr>
+            <a:lvl7pPr marL="2971800" indent="-228600" algn="l" defTabSz="914400" rtl="0" eaLnBrk="1" latinLnBrk="0" hangingPunct="1">
+              <a:lnSpc>
+                <a:spcPct val="90000"/>
+              </a:lnSpc>
+              <a:spcBef>
+                <a:spcPts val="500"/>
+              </a:spcBef>
+              <a:buFont typeface="Arial" panose="020B0604020202020204" pitchFamily="34" charset="0"/>
+              <a:buChar char="•"/>
+              <a:defRPr sz="1800" kern="1200">
+                <a:solidFill>
+                  <a:schemeClr val="tx1"/>
+                </a:solidFill>
+                <a:latin typeface="+mn-lt"/>
+                <a:ea typeface="+mn-ea"/>
+                <a:cs typeface="+mn-cs"/>
+              </a:defRPr>
+            </a:lvl7pPr>
+            <a:lvl8pPr marL="3429000" indent="-228600" algn="l" defTabSz="914400" rtl="0" eaLnBrk="1" latinLnBrk="0" hangingPunct="1">
+              <a:lnSpc>
+                <a:spcPct val="90000"/>
+              </a:lnSpc>
+              <a:spcBef>
+                <a:spcPts val="500"/>
+              </a:spcBef>
+              <a:buFont typeface="Arial" panose="020B0604020202020204" pitchFamily="34" charset="0"/>
+              <a:buChar char="•"/>
+              <a:defRPr sz="1800" kern="1200">
+                <a:solidFill>
+                  <a:schemeClr val="tx1"/>
+                </a:solidFill>
+                <a:latin typeface="+mn-lt"/>
+                <a:ea typeface="+mn-ea"/>
+                <a:cs typeface="+mn-cs"/>
+              </a:defRPr>
+            </a:lvl8pPr>
+            <a:lvl9pPr marL="3886200" indent="-228600" algn="l" defTabSz="914400" rtl="0" eaLnBrk="1" latinLnBrk="0" hangingPunct="1">
+              <a:lnSpc>
+                <a:spcPct val="90000"/>
+              </a:lnSpc>
+              <a:spcBef>
+                <a:spcPts val="500"/>
+              </a:spcBef>
+              <a:buFont typeface="Arial" panose="020B0604020202020204" pitchFamily="34" charset="0"/>
+              <a:buChar char="•"/>
+              <a:defRPr sz="1800" kern="1200">
+                <a:solidFill>
+                  <a:schemeClr val="tx1"/>
+                </a:solidFill>
+                <a:latin typeface="+mn-lt"/>
+                <a:ea typeface="+mn-ea"/>
+                <a:cs typeface="+mn-cs"/>
+              </a:defRPr>
+            </a:lvl9pPr>
+          </a:lstStyle>
+          <a:p>
+            <a:r>
+              <a:rPr lang="it-IT" dirty="0"/>
+              <a:t>Le istruzioni per il setup sono contenute nel README.md alla cartella root della repository </a:t>
+            </a:r>
+            <a:r>
+              <a:rPr lang="it-IT" dirty="0" err="1"/>
+              <a:t>git</a:t>
+            </a:r>
+            <a:r>
+              <a:rPr lang="it-IT" dirty="0"/>
+              <a:t>.</a:t>
+            </a:r>
+            <a:br>
+              <a:rPr lang="it-IT" dirty="0"/>
+            </a:br>
+            <a:r>
+              <a:rPr lang="it-IT" i="1" dirty="0" err="1"/>
+              <a:t>Permalink</a:t>
+            </a:r>
+            <a:r>
+              <a:rPr lang="it-IT" dirty="0"/>
+              <a:t>: </a:t>
+            </a:r>
+            <a:r>
+              <a:rPr lang="it-IT" dirty="0">
+                <a:hlinkClick r:id="rId3"/>
+              </a:rPr>
+              <a:t>https://github.com/StatJon/Progetto-IngegneriaSistemiWeb/blob/2f89bade79429db5b5d8412313acbe6e84d410d6/README.md</a:t>
+            </a:r>
+            <a:r>
+              <a:rPr lang="it-IT" dirty="0"/>
+              <a:t> </a:t>
+            </a:r>
+          </a:p>
+          <a:p>
+            <a:endParaRPr lang="it-IT" dirty="0"/>
+          </a:p>
+          <a:p>
+            <a:pPr marL="0" indent="0">
+              <a:buFont typeface="Arial" panose="020B0604020202020204" pitchFamily="34" charset="0"/>
               <a:buNone/>
             </a:pPr>
             <a:endParaRPr lang="it-IT" dirty="0"/>
@@ -3855,7 +4162,7 @@
           <a:p>
             <a:r>
               <a:rPr lang="it-IT" dirty="0"/>
-              <a:t>I clienti devono registrare un proprio account tramite l’apposita pagina per poter prenotare un appuntamento (pulsante login/utente). Se l’utente non fosse loggato ogni tentativo di accedere ai servizi di prenotazione verrà reindirizzato verso la pagina di login.</a:t>
+              <a:t>I clienti devono registrare un proprio account tramite l’apposita pagina per poter prenotare un appuntamento (pulsante login/utente). Qualora l’utente non fosse loggato, ogni tentativo di accedere ai servizi di prenotazione verrà reindirizzato verso la pagina di login.</a:t>
             </a:r>
           </a:p>
           <a:p>
@@ -3875,7 +4182,14 @@
           <a:p>
             <a:r>
               <a:rPr lang="it-IT" dirty="0"/>
-              <a:t>Successivamente è necessario scegliere quali servizi effettuare ed infine inserire i dettagli del veicolo e decidere la data e l’ora dell’appuntamento, vengono mostrati i giorni e gli orari disponibili in base alla disponibilità di meccanici a quell’ora-giorno.</a:t>
+              <a:t>Successivamente è necessario scegliere quali servizi effettuare ed infine inserire i dettagli del veicolo e decidere la data e l’ora dell’appuntamento.</a:t>
+            </a:r>
+            <a:br>
+              <a:rPr lang="it-IT" dirty="0"/>
+            </a:br>
+            <a:r>
+              <a:rPr lang="it-IT" dirty="0"/>
+              <a:t>Vengono mostrati i giorni e gli orari disponibili in base alla disponibilità di meccanici a quell’ora-giorno ed al tempo necessario.</a:t>
             </a:r>
           </a:p>
           <a:p>
@@ -3977,7 +4291,7 @@
           <a:p>
             <a:r>
               <a:rPr lang="it-IT" dirty="0"/>
-              <a:t>Una volta acceduti, la dashboard presenta tutti i lavori assegnati al dipendente. La dashboard permette, oltre a visionare i propri lavori, di modificare lo stato dei lavori selezionando la riga lavoro interessata (tramite radio </a:t>
+              <a:t>Una volta acceduti, la dashboard presenta tutti i lavori assegnati al dipendente. La dashboard permette, oltre a visionare i propri lavori, di modificare lo stato dei lavori selezionando la riga lavoro interessata (tramite radio-</a:t>
             </a:r>
             <a:r>
               <a:rPr lang="it-IT" dirty="0" err="1"/>

--- a/Presentazione Progetto.pptx
+++ b/Presentazione Progetto.pptx
@@ -3760,7 +3760,7 @@
         </p:spPr>
         <p:txBody>
           <a:bodyPr vert="horz" lIns="91440" tIns="45720" rIns="91440" bIns="45720" rtlCol="0">
-            <a:normAutofit fontScale="92500" lnSpcReduction="10000"/>
+            <a:normAutofit/>
           </a:bodyPr>
           <a:lstStyle>
             <a:lvl1pPr marL="228600" indent="-228600" algn="l" defTabSz="914400" rtl="0" eaLnBrk="1" latinLnBrk="0" hangingPunct="1">
@@ -3936,32 +3936,9 @@
               <a:t>git</a:t>
             </a:r>
             <a:r>
-              <a:rPr lang="it-IT" dirty="0"/>
+              <a:rPr lang="it-IT"/>
               <a:t>.</a:t>
             </a:r>
-            <a:br>
-              <a:rPr lang="it-IT" dirty="0"/>
-            </a:br>
-            <a:r>
-              <a:rPr lang="it-IT" i="1" dirty="0" err="1"/>
-              <a:t>Permalink</a:t>
-            </a:r>
-            <a:r>
-              <a:rPr lang="it-IT" dirty="0"/>
-              <a:t>: </a:t>
-            </a:r>
-            <a:r>
-              <a:rPr lang="it-IT" dirty="0">
-                <a:hlinkClick r:id="rId3"/>
-              </a:rPr>
-              <a:t>https://github.com/StatJon/Progetto-IngegneriaSistemiWeb/blob/2f89bade79429db5b5d8412313acbe6e84d410d6/README.md</a:t>
-            </a:r>
-            <a:r>
-              <a:rPr lang="it-IT" dirty="0"/>
-              <a:t> </a:t>
-            </a:r>
-          </a:p>
-          <a:p>
             <a:endParaRPr lang="it-IT" dirty="0"/>
           </a:p>
           <a:p>
